--- a/Git__3.pptx
+++ b/Git__3.pptx
@@ -278,7 +278,7 @@
           <a:p>
             <a:fld id="{531DBD78-73C5-4371-9795-3675F1452312}" type="datetimeFigureOut">
               <a:rPr lang="ko-KR" altLang="en-US" smtClean="0"/>
-              <a:t>2025-10-29</a:t>
+              <a:t>2025-11-05(Wed)</a:t>
             </a:fld>
             <a:endParaRPr lang="ko-KR" altLang="en-US"/>
           </a:p>
@@ -842,7 +842,7 @@
           <a:p>
             <a:fld id="{493C7343-E182-4B90-880C-3D28E6B66466}" type="datetimeFigureOut">
               <a:rPr lang="ko-KR" altLang="en-US" smtClean="0"/>
-              <a:t>2025-10-29</a:t>
+              <a:t>2025-11-05(Wed)</a:t>
             </a:fld>
             <a:endParaRPr lang="ko-KR" altLang="en-US"/>
           </a:p>
@@ -1010,7 +1010,7 @@
           <a:p>
             <a:fld id="{493C7343-E182-4B90-880C-3D28E6B66466}" type="datetimeFigureOut">
               <a:rPr lang="ko-KR" altLang="en-US" smtClean="0"/>
-              <a:t>2025-10-29</a:t>
+              <a:t>2025-11-05(Wed)</a:t>
             </a:fld>
             <a:endParaRPr lang="ko-KR" altLang="en-US"/>
           </a:p>
@@ -1188,7 +1188,7 @@
           <a:p>
             <a:fld id="{493C7343-E182-4B90-880C-3D28E6B66466}" type="datetimeFigureOut">
               <a:rPr lang="ko-KR" altLang="en-US" smtClean="0"/>
-              <a:t>2025-10-29</a:t>
+              <a:t>2025-11-05(Wed)</a:t>
             </a:fld>
             <a:endParaRPr lang="ko-KR" altLang="en-US"/>
           </a:p>
@@ -1356,7 +1356,7 @@
           <a:p>
             <a:fld id="{493C7343-E182-4B90-880C-3D28E6B66466}" type="datetimeFigureOut">
               <a:rPr lang="ko-KR" altLang="en-US" smtClean="0"/>
-              <a:t>2025-10-29</a:t>
+              <a:t>2025-11-05(Wed)</a:t>
             </a:fld>
             <a:endParaRPr lang="ko-KR" altLang="en-US"/>
           </a:p>
@@ -1601,7 +1601,7 @@
           <a:p>
             <a:fld id="{493C7343-E182-4B90-880C-3D28E6B66466}" type="datetimeFigureOut">
               <a:rPr lang="ko-KR" altLang="en-US" smtClean="0"/>
-              <a:t>2025-10-29</a:t>
+              <a:t>2025-11-05(Wed)</a:t>
             </a:fld>
             <a:endParaRPr lang="ko-KR" altLang="en-US"/>
           </a:p>
@@ -1830,7 +1830,7 @@
           <a:p>
             <a:fld id="{493C7343-E182-4B90-880C-3D28E6B66466}" type="datetimeFigureOut">
               <a:rPr lang="ko-KR" altLang="en-US" smtClean="0"/>
-              <a:t>2025-10-29</a:t>
+              <a:t>2025-11-05(Wed)</a:t>
             </a:fld>
             <a:endParaRPr lang="ko-KR" altLang="en-US"/>
           </a:p>
@@ -2194,7 +2194,7 @@
           <a:p>
             <a:fld id="{493C7343-E182-4B90-880C-3D28E6B66466}" type="datetimeFigureOut">
               <a:rPr lang="ko-KR" altLang="en-US" smtClean="0"/>
-              <a:t>2025-10-29</a:t>
+              <a:t>2025-11-05(Wed)</a:t>
             </a:fld>
             <a:endParaRPr lang="ko-KR" altLang="en-US"/>
           </a:p>
@@ -2311,7 +2311,7 @@
           <a:p>
             <a:fld id="{493C7343-E182-4B90-880C-3D28E6B66466}" type="datetimeFigureOut">
               <a:rPr lang="ko-KR" altLang="en-US" smtClean="0"/>
-              <a:t>2025-10-29</a:t>
+              <a:t>2025-11-05(Wed)</a:t>
             </a:fld>
             <a:endParaRPr lang="ko-KR" altLang="en-US"/>
           </a:p>
@@ -2406,7 +2406,7 @@
           <a:p>
             <a:fld id="{493C7343-E182-4B90-880C-3D28E6B66466}" type="datetimeFigureOut">
               <a:rPr lang="ko-KR" altLang="en-US" smtClean="0"/>
-              <a:t>2025-10-29</a:t>
+              <a:t>2025-11-05(Wed)</a:t>
             </a:fld>
             <a:endParaRPr lang="ko-KR" altLang="en-US"/>
           </a:p>
@@ -2681,7 +2681,7 @@
           <a:p>
             <a:fld id="{493C7343-E182-4B90-880C-3D28E6B66466}" type="datetimeFigureOut">
               <a:rPr lang="ko-KR" altLang="en-US" smtClean="0"/>
-              <a:t>2025-10-29</a:t>
+              <a:t>2025-11-05(Wed)</a:t>
             </a:fld>
             <a:endParaRPr lang="ko-KR" altLang="en-US"/>
           </a:p>
@@ -2933,7 +2933,7 @@
           <a:p>
             <a:fld id="{493C7343-E182-4B90-880C-3D28E6B66466}" type="datetimeFigureOut">
               <a:rPr lang="ko-KR" altLang="en-US" smtClean="0"/>
-              <a:t>2025-10-29</a:t>
+              <a:t>2025-11-05(Wed)</a:t>
             </a:fld>
             <a:endParaRPr lang="ko-KR" altLang="en-US"/>
           </a:p>
@@ -3144,7 +3144,7 @@
           <a:p>
             <a:fld id="{493C7343-E182-4B90-880C-3D28E6B66466}" type="datetimeFigureOut">
               <a:rPr lang="ko-KR" altLang="en-US" smtClean="0"/>
-              <a:t>2025-10-29</a:t>
+              <a:t>2025-11-05(Wed)</a:t>
             </a:fld>
             <a:endParaRPr lang="ko-KR" altLang="en-US"/>
           </a:p>
